--- a/labs/Mobile-and-Embedded-Lab1.pptx
+++ b/labs/Mobile-and-Embedded-Lab1.pptx
@@ -5,15 +5,17 @@
     <p:sldMasterId id="2147483648" r:id="rId1"/>
   </p:sldMasterIdLst>
   <p:notesMasterIdLst>
-    <p:notesMasterId r:id="rId8"/>
+    <p:notesMasterId r:id="rId10"/>
   </p:notesMasterIdLst>
   <p:sldIdLst>
     <p:sldId id="256" r:id="rId2"/>
     <p:sldId id="258" r:id="rId3"/>
     <p:sldId id="261" r:id="rId4"/>
     <p:sldId id="289" r:id="rId5"/>
-    <p:sldId id="287" r:id="rId6"/>
-    <p:sldId id="288" r:id="rId7"/>
+    <p:sldId id="290" r:id="rId6"/>
+    <p:sldId id="291" r:id="rId7"/>
+    <p:sldId id="287" r:id="rId8"/>
+    <p:sldId id="288" r:id="rId9"/>
   </p:sldIdLst>
   <p:sldSz cx="12192000" cy="6858000"/>
   <p:notesSz cx="6858000" cy="9144000"/>
@@ -210,7 +212,7 @@
           <a:p>
             <a:fld id="{03371807-75D2-4B48-9BC1-C0791C7EACC9}" type="datetimeFigureOut">
               <a:rPr lang="en-US" smtClean="0"/>
-              <a:t>2/12/26</a:t>
+              <a:t>2/18/26</a:t>
             </a:fld>
             <a:endParaRPr lang="en-US"/>
           </a:p>
@@ -624,7 +626,7 @@
           <a:p>
             <a:fld id="{779551AF-0EE3-DD4B-B4EF-6D8229EA0D86}" type="datetimeFigureOut">
               <a:rPr lang="en-US" smtClean="0"/>
-              <a:t>2/12/26</a:t>
+              <a:t>2/18/26</a:t>
             </a:fld>
             <a:endParaRPr lang="en-US"/>
           </a:p>
@@ -822,7 +824,7 @@
           <a:p>
             <a:fld id="{779551AF-0EE3-DD4B-B4EF-6D8229EA0D86}" type="datetimeFigureOut">
               <a:rPr lang="en-US" smtClean="0"/>
-              <a:t>2/12/26</a:t>
+              <a:t>2/18/26</a:t>
             </a:fld>
             <a:endParaRPr lang="en-US"/>
           </a:p>
@@ -1030,7 +1032,7 @@
           <a:p>
             <a:fld id="{779551AF-0EE3-DD4B-B4EF-6D8229EA0D86}" type="datetimeFigureOut">
               <a:rPr lang="en-US" smtClean="0"/>
-              <a:t>2/12/26</a:t>
+              <a:t>2/18/26</a:t>
             </a:fld>
             <a:endParaRPr lang="en-US"/>
           </a:p>
@@ -1228,7 +1230,7 @@
           <a:p>
             <a:fld id="{779551AF-0EE3-DD4B-B4EF-6D8229EA0D86}" type="datetimeFigureOut">
               <a:rPr lang="en-US" smtClean="0"/>
-              <a:t>2/12/26</a:t>
+              <a:t>2/18/26</a:t>
             </a:fld>
             <a:endParaRPr lang="en-US"/>
           </a:p>
@@ -1503,7 +1505,7 @@
           <a:p>
             <a:fld id="{779551AF-0EE3-DD4B-B4EF-6D8229EA0D86}" type="datetimeFigureOut">
               <a:rPr lang="en-US" smtClean="0"/>
-              <a:t>2/12/26</a:t>
+              <a:t>2/18/26</a:t>
             </a:fld>
             <a:endParaRPr lang="en-US"/>
           </a:p>
@@ -1768,7 +1770,7 @@
           <a:p>
             <a:fld id="{779551AF-0EE3-DD4B-B4EF-6D8229EA0D86}" type="datetimeFigureOut">
               <a:rPr lang="en-US" smtClean="0"/>
-              <a:t>2/12/26</a:t>
+              <a:t>2/18/26</a:t>
             </a:fld>
             <a:endParaRPr lang="en-US"/>
           </a:p>
@@ -2180,7 +2182,7 @@
           <a:p>
             <a:fld id="{779551AF-0EE3-DD4B-B4EF-6D8229EA0D86}" type="datetimeFigureOut">
               <a:rPr lang="en-US" smtClean="0"/>
-              <a:t>2/12/26</a:t>
+              <a:t>2/18/26</a:t>
             </a:fld>
             <a:endParaRPr lang="en-US"/>
           </a:p>
@@ -2321,7 +2323,7 @@
           <a:p>
             <a:fld id="{779551AF-0EE3-DD4B-B4EF-6D8229EA0D86}" type="datetimeFigureOut">
               <a:rPr lang="en-US" smtClean="0"/>
-              <a:t>2/12/26</a:t>
+              <a:t>2/18/26</a:t>
             </a:fld>
             <a:endParaRPr lang="en-US"/>
           </a:p>
@@ -2434,7 +2436,7 @@
           <a:p>
             <a:fld id="{779551AF-0EE3-DD4B-B4EF-6D8229EA0D86}" type="datetimeFigureOut">
               <a:rPr lang="en-US" smtClean="0"/>
-              <a:t>2/12/26</a:t>
+              <a:t>2/18/26</a:t>
             </a:fld>
             <a:endParaRPr lang="en-US"/>
           </a:p>
@@ -2745,7 +2747,7 @@
           <a:p>
             <a:fld id="{779551AF-0EE3-DD4B-B4EF-6D8229EA0D86}" type="datetimeFigureOut">
               <a:rPr lang="en-US" smtClean="0"/>
-              <a:t>2/12/26</a:t>
+              <a:t>2/18/26</a:t>
             </a:fld>
             <a:endParaRPr lang="en-US"/>
           </a:p>
@@ -3033,7 +3035,7 @@
           <a:p>
             <a:fld id="{779551AF-0EE3-DD4B-B4EF-6D8229EA0D86}" type="datetimeFigureOut">
               <a:rPr lang="en-US" smtClean="0"/>
-              <a:t>2/12/26</a:t>
+              <a:t>2/18/26</a:t>
             </a:fld>
             <a:endParaRPr lang="en-US"/>
           </a:p>
@@ -3274,7 +3276,7 @@
           <a:p>
             <a:fld id="{779551AF-0EE3-DD4B-B4EF-6D8229EA0D86}" type="datetimeFigureOut">
               <a:rPr lang="en-US" smtClean="0"/>
-              <a:t>2/12/26</a:t>
+              <a:t>2/18/26</a:t>
             </a:fld>
             <a:endParaRPr lang="en-US"/>
           </a:p>
@@ -4802,8 +4804,8 @@
         </p:nvSpPr>
         <p:spPr>
           <a:xfrm>
-            <a:off x="827186" y="243512"/>
-            <a:ext cx="10537627" cy="6370975"/>
+            <a:off x="827186" y="1720840"/>
+            <a:ext cx="10537627" cy="3416320"/>
           </a:xfrm>
           <a:prstGeom prst="rect">
             <a:avLst/>
@@ -4880,91 +4882,40 @@
             </a:r>
           </a:p>
           <a:p>
-            <a:pPr>
-              <a:buFont typeface="Wingdings" pitchFamily="2" charset="2"/>
-              <a:buChar char="Ø"/>
-            </a:pPr>
-            <a:r>
-              <a:rPr lang="en-US" sz="2400" dirty="0"/>
-              <a:t> The readme MUST contain the following sections (in this order):</a:t>
-            </a:r>
-          </a:p>
-          <a:p>
-            <a:pPr lvl="1">
-              <a:buFont typeface="Wingdings" pitchFamily="2" charset="2"/>
-              <a:buChar char="Ø"/>
-            </a:pPr>
-            <a:r>
-              <a:rPr lang="en-US" sz="2400" dirty="0"/>
-              <a:t> </a:t>
-            </a:r>
-            <a:r>
-              <a:rPr lang="en-US" sz="2400" b="1" dirty="0"/>
-              <a:t>Team composition</a:t>
-            </a:r>
-            <a:r>
-              <a:rPr lang="en-US" sz="2400" dirty="0"/>
-              <a:t>, 1 person / row (Name, Surname, Group)</a:t>
-            </a:r>
-          </a:p>
-          <a:p>
-            <a:pPr lvl="1">
-              <a:buFont typeface="Wingdings" pitchFamily="2" charset="2"/>
-              <a:buChar char="Ø"/>
-            </a:pPr>
-            <a:r>
-              <a:rPr lang="en-US" sz="2400" dirty="0"/>
-              <a:t> </a:t>
-            </a:r>
-            <a:r>
-              <a:rPr lang="en-US" sz="2400" b="1" dirty="0"/>
-              <a:t>Project description </a:t>
-            </a:r>
-            <a:r>
-              <a:rPr lang="en-US" sz="2400" dirty="0"/>
-              <a:t>(brief)</a:t>
-            </a:r>
-            <a:r>
-              <a:rPr lang="en-US" sz="2400" b="1" dirty="0"/>
-              <a:t> </a:t>
-            </a:r>
-            <a:r>
-              <a:rPr lang="en-US" sz="2400" dirty="0"/>
-              <a:t>of the implemented app (what it does, what ‘screens’ it has,  etc.)</a:t>
-            </a:r>
-          </a:p>
-          <a:p>
-            <a:pPr lvl="1">
-              <a:buFont typeface="Wingdings" pitchFamily="2" charset="2"/>
-              <a:buChar char="Ø"/>
-            </a:pPr>
-            <a:r>
-              <a:rPr lang="en-US" sz="2400" dirty="0"/>
-              <a:t> </a:t>
-            </a:r>
-            <a:r>
-              <a:rPr lang="en-US" sz="2400" b="1" dirty="0"/>
-              <a:t>Other information </a:t>
-            </a:r>
-            <a:r>
-              <a:rPr lang="en-US" sz="2400" dirty="0"/>
-              <a:t>(anything else you would like to mention)</a:t>
-            </a:r>
-          </a:p>
-          <a:p>
-            <a:pPr>
-              <a:buFont typeface="Wingdings" pitchFamily="2" charset="2"/>
-              <a:buChar char="Ø"/>
-            </a:pPr>
-            <a:r>
-              <a:rPr lang="en-US" sz="2400" b="1" dirty="0"/>
-              <a:t> </a:t>
-            </a:r>
-            <a:r>
-              <a:rPr lang="en-US" sz="2400" dirty="0"/>
-              <a:t>The final presentation will be a live demo accompanied by slides and must not take more than 15 minutes / team. Questions will be asked based on the code; you should NOT copy entire projects from the internet, and you should not vibe code stuff that you can’t explain later or do not already understand.</a:t>
-            </a:r>
             <a:endParaRPr lang="en-US" sz="2400" b="1" dirty="0"/>
+          </a:p>
+        </p:txBody>
+      </p:sp>
+      <p:sp>
+        <p:nvSpPr>
+          <p:cNvPr id="2" name="Title 1">
+            <a:extLst>
+              <a:ext uri="{FF2B5EF4-FFF2-40B4-BE49-F238E27FC236}">
+                <a16:creationId xmlns:a16="http://schemas.microsoft.com/office/drawing/2014/main" id="{70FA7C87-4EF5-2045-247B-16669C6448C2}"/>
+              </a:ext>
+            </a:extLst>
+          </p:cNvPr>
+          <p:cNvSpPr>
+            <a:spLocks noGrp="1"/>
+          </p:cNvSpPr>
+          <p:nvPr>
+            <p:ph type="title"/>
+          </p:nvPr>
+        </p:nvSpPr>
+        <p:spPr>
+          <a:xfrm>
+            <a:off x="838200" y="365125"/>
+            <a:ext cx="10515600" cy="1325563"/>
+          </a:xfrm>
+        </p:spPr>
+        <p:txBody>
+          <a:bodyPr/>
+          <a:lstStyle/>
+          <a:p>
+            <a:r>
+              <a:rPr lang="en-US" dirty="0"/>
+              <a:t>Project details</a:t>
+            </a:r>
           </a:p>
         </p:txBody>
       </p:sp>
@@ -4982,6 +4933,338 @@
 </file>
 
 <file path=ppt/slides/slide5.xml><?xml version="1.0" encoding="utf-8"?>
+<p:sld xmlns:a="http://schemas.openxmlformats.org/drawingml/2006/main" xmlns:r="http://schemas.openxmlformats.org/officeDocument/2006/relationships" xmlns:p="http://schemas.openxmlformats.org/presentationml/2006/main">
+  <p:cSld>
+    <p:spTree>
+      <p:nvGrpSpPr>
+        <p:cNvPr id="1" name="">
+          <a:extLst>
+            <a:ext uri="{FF2B5EF4-FFF2-40B4-BE49-F238E27FC236}">
+              <a16:creationId xmlns:a16="http://schemas.microsoft.com/office/drawing/2014/main" id="{025E9CE0-1E34-8ABD-BB67-B62464E5186E}"/>
+            </a:ext>
+          </a:extLst>
+        </p:cNvPr>
+        <p:cNvGrpSpPr/>
+        <p:nvPr/>
+      </p:nvGrpSpPr>
+      <p:grpSpPr>
+        <a:xfrm>
+          <a:off x="0" y="0"/>
+          <a:ext cx="0" cy="0"/>
+          <a:chOff x="0" y="0"/>
+          <a:chExt cx="0" cy="0"/>
+        </a:xfrm>
+      </p:grpSpPr>
+      <p:sp>
+        <p:nvSpPr>
+          <p:cNvPr id="5" name="TextBox 4">
+            <a:extLst>
+              <a:ext uri="{FF2B5EF4-FFF2-40B4-BE49-F238E27FC236}">
+                <a16:creationId xmlns:a16="http://schemas.microsoft.com/office/drawing/2014/main" id="{2D9273A4-8A42-991A-AB54-D702AA8C3E34}"/>
+              </a:ext>
+            </a:extLst>
+          </p:cNvPr>
+          <p:cNvSpPr txBox="1"/>
+          <p:nvPr/>
+        </p:nvSpPr>
+        <p:spPr>
+          <a:xfrm>
+            <a:off x="827186" y="1720840"/>
+            <a:ext cx="10537627" cy="3416320"/>
+          </a:xfrm>
+          <a:prstGeom prst="rect">
+            <a:avLst/>
+          </a:prstGeom>
+          <a:noFill/>
+        </p:spPr>
+        <p:txBody>
+          <a:bodyPr wrap="square" rtlCol="0">
+            <a:spAutoFit/>
+          </a:bodyPr>
+          <a:lstStyle/>
+          <a:p>
+            <a:pPr>
+              <a:buFont typeface="Wingdings" pitchFamily="2" charset="2"/>
+              <a:buChar char="Ø"/>
+            </a:pPr>
+            <a:r>
+              <a:rPr lang="en-US" sz="2400" dirty="0"/>
+              <a:t>The readme MUST contain the following sections (in this order):</a:t>
+            </a:r>
+          </a:p>
+          <a:p>
+            <a:pPr lvl="1">
+              <a:buFont typeface="Wingdings" pitchFamily="2" charset="2"/>
+              <a:buChar char="Ø"/>
+            </a:pPr>
+            <a:r>
+              <a:rPr lang="en-US" sz="2400" dirty="0"/>
+              <a:t> </a:t>
+            </a:r>
+            <a:r>
+              <a:rPr lang="en-US" sz="2400" b="1" dirty="0"/>
+              <a:t>Team composition</a:t>
+            </a:r>
+            <a:r>
+              <a:rPr lang="en-US" sz="2400" dirty="0"/>
+              <a:t>, 1 person / row (Name, Surname, Group)</a:t>
+            </a:r>
+          </a:p>
+          <a:p>
+            <a:pPr lvl="1">
+              <a:buFont typeface="Wingdings" pitchFamily="2" charset="2"/>
+              <a:buChar char="Ø"/>
+            </a:pPr>
+            <a:r>
+              <a:rPr lang="en-US" sz="2400" dirty="0"/>
+              <a:t> </a:t>
+            </a:r>
+            <a:r>
+              <a:rPr lang="en-US" sz="2400" b="1" dirty="0"/>
+              <a:t>Project description </a:t>
+            </a:r>
+            <a:r>
+              <a:rPr lang="en-US" sz="2400" dirty="0"/>
+              <a:t>(brief)</a:t>
+            </a:r>
+            <a:r>
+              <a:rPr lang="en-US" sz="2400" b="1" dirty="0"/>
+              <a:t> </a:t>
+            </a:r>
+            <a:r>
+              <a:rPr lang="en-US" sz="2400" dirty="0"/>
+              <a:t>of the implemented app (what it does, what ‘screens’ it has,  etc.)</a:t>
+            </a:r>
+          </a:p>
+          <a:p>
+            <a:pPr lvl="1">
+              <a:buFont typeface="Wingdings" pitchFamily="2" charset="2"/>
+              <a:buChar char="Ø"/>
+            </a:pPr>
+            <a:r>
+              <a:rPr lang="en-US" sz="2400" dirty="0"/>
+              <a:t> </a:t>
+            </a:r>
+            <a:r>
+              <a:rPr lang="en-US" sz="2400" b="1" dirty="0"/>
+              <a:t>Other information </a:t>
+            </a:r>
+            <a:r>
+              <a:rPr lang="en-US" sz="2400" dirty="0"/>
+              <a:t>(anything else you would like to mention)</a:t>
+            </a:r>
+          </a:p>
+          <a:p>
+            <a:pPr>
+              <a:buFont typeface="Wingdings" pitchFamily="2" charset="2"/>
+              <a:buChar char="Ø"/>
+            </a:pPr>
+            <a:r>
+              <a:rPr lang="en-US" sz="2400" b="1" dirty="0"/>
+              <a:t> </a:t>
+            </a:r>
+            <a:r>
+              <a:rPr lang="en-US" sz="2400" dirty="0"/>
+              <a:t>The final presentation will be a live demo accompanied by slides and must not take more than 15 minutes / team. Questions will be asked based on the code; you should NOT copy entire projects from the internet, and you should not vibe code stuff that you can’t explain later or do not already understand.</a:t>
+            </a:r>
+            <a:endParaRPr lang="en-US" sz="2400" b="1" dirty="0"/>
+          </a:p>
+        </p:txBody>
+      </p:sp>
+    </p:spTree>
+    <p:extLst>
+      <p:ext uri="{BB962C8B-B14F-4D97-AF65-F5344CB8AC3E}">
+        <p14:creationId xmlns:p14="http://schemas.microsoft.com/office/powerpoint/2010/main" val="2345152578"/>
+      </p:ext>
+    </p:extLst>
+  </p:cSld>
+  <p:clrMapOvr>
+    <a:masterClrMapping/>
+  </p:clrMapOvr>
+</p:sld>
+</file>
+
+<file path=ppt/slides/slide6.xml><?xml version="1.0" encoding="utf-8"?>
+<p:sld xmlns:a="http://schemas.openxmlformats.org/drawingml/2006/main" xmlns:r="http://schemas.openxmlformats.org/officeDocument/2006/relationships" xmlns:p="http://schemas.openxmlformats.org/presentationml/2006/main">
+  <p:cSld>
+    <p:spTree>
+      <p:nvGrpSpPr>
+        <p:cNvPr id="1" name="">
+          <a:extLst>
+            <a:ext uri="{FF2B5EF4-FFF2-40B4-BE49-F238E27FC236}">
+              <a16:creationId xmlns:a16="http://schemas.microsoft.com/office/drawing/2014/main" id="{010D2B6E-47F7-E296-2BF9-5C0ED4335B47}"/>
+            </a:ext>
+          </a:extLst>
+        </p:cNvPr>
+        <p:cNvGrpSpPr/>
+        <p:nvPr/>
+      </p:nvGrpSpPr>
+      <p:grpSpPr>
+        <a:xfrm>
+          <a:off x="0" y="0"/>
+          <a:ext cx="0" cy="0"/>
+          <a:chOff x="0" y="0"/>
+          <a:chExt cx="0" cy="0"/>
+        </a:xfrm>
+      </p:grpSpPr>
+      <p:sp>
+        <p:nvSpPr>
+          <p:cNvPr id="5" name="TextBox 4">
+            <a:extLst>
+              <a:ext uri="{FF2B5EF4-FFF2-40B4-BE49-F238E27FC236}">
+                <a16:creationId xmlns:a16="http://schemas.microsoft.com/office/drawing/2014/main" id="{D8FFC404-388D-059A-92C4-2216AB771D46}"/>
+              </a:ext>
+            </a:extLst>
+          </p:cNvPr>
+          <p:cNvSpPr txBox="1"/>
+          <p:nvPr/>
+        </p:nvSpPr>
+        <p:spPr>
+          <a:xfrm>
+            <a:off x="838200" y="2213246"/>
+            <a:ext cx="10537627" cy="3785652"/>
+          </a:xfrm>
+          <a:prstGeom prst="rect">
+            <a:avLst/>
+          </a:prstGeom>
+          <a:noFill/>
+        </p:spPr>
+        <p:txBody>
+          <a:bodyPr wrap="square" rtlCol="0">
+            <a:spAutoFit/>
+          </a:bodyPr>
+          <a:lstStyle/>
+          <a:p>
+            <a:pPr>
+              <a:buFont typeface="Wingdings" pitchFamily="2" charset="2"/>
+              <a:buChar char="Ø"/>
+            </a:pPr>
+            <a:r>
+              <a:rPr lang="en-US" sz="2400" dirty="0"/>
+              <a:t> Think of a project idea and form teams in a Google Sheet (with the following columns: Teammate 1, Teammate 2, Project Description)</a:t>
+            </a:r>
+          </a:p>
+          <a:p>
+            <a:pPr>
+              <a:buFont typeface="Wingdings" pitchFamily="2" charset="2"/>
+              <a:buChar char="Ø"/>
+            </a:pPr>
+            <a:r>
+              <a:rPr lang="en-US" sz="2400" dirty="0"/>
+              <a:t> After forming the teams and writing a consistent description in the doc we will have a discussion to validate its complexity</a:t>
+            </a:r>
+          </a:p>
+          <a:p>
+            <a:pPr>
+              <a:buFont typeface="Wingdings" pitchFamily="2" charset="2"/>
+              <a:buChar char="Ø"/>
+            </a:pPr>
+            <a:endParaRPr lang="en-US" sz="2400" dirty="0"/>
+          </a:p>
+          <a:p>
+            <a:pPr>
+              <a:buFont typeface="Wingdings" pitchFamily="2" charset="2"/>
+              <a:buChar char="Ø"/>
+            </a:pPr>
+            <a:r>
+              <a:rPr lang="en-US" sz="2400" dirty="0"/>
+              <a:t> Your project must at least have the following:</a:t>
+            </a:r>
+          </a:p>
+          <a:p>
+            <a:pPr lvl="1">
+              <a:buFont typeface="Wingdings" pitchFamily="2" charset="2"/>
+              <a:buChar char="Ø"/>
+            </a:pPr>
+            <a:r>
+              <a:rPr lang="en-US" sz="2400" dirty="0"/>
+              <a:t> State management using BLoC</a:t>
+            </a:r>
+          </a:p>
+          <a:p>
+            <a:pPr lvl="1">
+              <a:buFont typeface="Wingdings" pitchFamily="2" charset="2"/>
+              <a:buChar char="Ø"/>
+            </a:pPr>
+            <a:r>
+              <a:rPr lang="en-US" sz="2400" dirty="0"/>
+              <a:t> Authentication</a:t>
+            </a:r>
+          </a:p>
+          <a:p>
+            <a:pPr lvl="1">
+              <a:buFont typeface="Wingdings" pitchFamily="2" charset="2"/>
+              <a:buChar char="Ø"/>
+            </a:pPr>
+            <a:r>
+              <a:rPr lang="en-US" sz="2400" dirty="0"/>
+              <a:t> Data persistence (any kind of database) and offline first capabilities</a:t>
+            </a:r>
+          </a:p>
+          <a:p>
+            <a:pPr lvl="1">
+              <a:buFont typeface="Wingdings" pitchFamily="2" charset="2"/>
+              <a:buChar char="Ø"/>
+            </a:pPr>
+            <a:r>
+              <a:rPr lang="en-US" sz="2400" dirty="0"/>
+              <a:t> Realtime capabilities using </a:t>
+            </a:r>
+            <a:r>
+              <a:rPr lang="en-US" sz="2400" dirty="0" err="1"/>
+              <a:t>Websockets</a:t>
+            </a:r>
+            <a:endParaRPr lang="en-US" sz="2400" dirty="0"/>
+          </a:p>
+        </p:txBody>
+      </p:sp>
+      <p:sp>
+        <p:nvSpPr>
+          <p:cNvPr id="2" name="Title 1">
+            <a:extLst>
+              <a:ext uri="{FF2B5EF4-FFF2-40B4-BE49-F238E27FC236}">
+                <a16:creationId xmlns:a16="http://schemas.microsoft.com/office/drawing/2014/main" id="{F701C72E-F8D1-87D9-2A1B-765D77FC37BD}"/>
+              </a:ext>
+            </a:extLst>
+          </p:cNvPr>
+          <p:cNvSpPr>
+            <a:spLocks noGrp="1"/>
+          </p:cNvSpPr>
+          <p:nvPr>
+            <p:ph type="title"/>
+          </p:nvPr>
+        </p:nvSpPr>
+        <p:spPr>
+          <a:xfrm>
+            <a:off x="838200" y="365125"/>
+            <a:ext cx="10515600" cy="1325563"/>
+          </a:xfrm>
+        </p:spPr>
+        <p:txBody>
+          <a:bodyPr/>
+          <a:lstStyle/>
+          <a:p>
+            <a:r>
+              <a:rPr lang="en-US" dirty="0"/>
+              <a:t>Project guidelines</a:t>
+            </a:r>
+          </a:p>
+        </p:txBody>
+      </p:sp>
+    </p:spTree>
+    <p:extLst>
+      <p:ext uri="{BB962C8B-B14F-4D97-AF65-F5344CB8AC3E}">
+        <p14:creationId xmlns:p14="http://schemas.microsoft.com/office/powerpoint/2010/main" val="481490178"/>
+      </p:ext>
+    </p:extLst>
+  </p:cSld>
+  <p:clrMapOvr>
+    <a:masterClrMapping/>
+  </p:clrMapOvr>
+</p:sld>
+</file>
+
+<file path=ppt/slides/slide7.xml><?xml version="1.0" encoding="utf-8"?>
 <p:sld xmlns:a="http://schemas.openxmlformats.org/drawingml/2006/main" xmlns:r="http://schemas.openxmlformats.org/officeDocument/2006/relationships" xmlns:p="http://schemas.openxmlformats.org/presentationml/2006/main">
   <p:cSld>
     <p:bg>
@@ -5068,7 +5351,7 @@
 </p:sld>
 </file>
 
-<file path=ppt/slides/slide6.xml><?xml version="1.0" encoding="utf-8"?>
+<file path=ppt/slides/slide8.xml><?xml version="1.0" encoding="utf-8"?>
 <p:sld xmlns:a="http://schemas.openxmlformats.org/drawingml/2006/main" xmlns:r="http://schemas.openxmlformats.org/officeDocument/2006/relationships" xmlns:p="http://schemas.openxmlformats.org/presentationml/2006/main">
   <p:cSld>
     <p:spTree>

--- a/labs/Mobile-and-Embedded-Lab1.pptx
+++ b/labs/Mobile-and-Embedded-Lab1.pptx
@@ -212,7 +212,7 @@
           <a:p>
             <a:fld id="{03371807-75D2-4B48-9BC1-C0791C7EACC9}" type="datetimeFigureOut">
               <a:rPr lang="en-US" smtClean="0"/>
-              <a:t>2/18/26</a:t>
+              <a:t>3/3/26</a:t>
             </a:fld>
             <a:endParaRPr lang="en-US"/>
           </a:p>
@@ -626,7 +626,7 @@
           <a:p>
             <a:fld id="{779551AF-0EE3-DD4B-B4EF-6D8229EA0D86}" type="datetimeFigureOut">
               <a:rPr lang="en-US" smtClean="0"/>
-              <a:t>2/18/26</a:t>
+              <a:t>3/3/26</a:t>
             </a:fld>
             <a:endParaRPr lang="en-US"/>
           </a:p>
@@ -824,7 +824,7 @@
           <a:p>
             <a:fld id="{779551AF-0EE3-DD4B-B4EF-6D8229EA0D86}" type="datetimeFigureOut">
               <a:rPr lang="en-US" smtClean="0"/>
-              <a:t>2/18/26</a:t>
+              <a:t>3/3/26</a:t>
             </a:fld>
             <a:endParaRPr lang="en-US"/>
           </a:p>
@@ -1032,7 +1032,7 @@
           <a:p>
             <a:fld id="{779551AF-0EE3-DD4B-B4EF-6D8229EA0D86}" type="datetimeFigureOut">
               <a:rPr lang="en-US" smtClean="0"/>
-              <a:t>2/18/26</a:t>
+              <a:t>3/3/26</a:t>
             </a:fld>
             <a:endParaRPr lang="en-US"/>
           </a:p>
@@ -1230,7 +1230,7 @@
           <a:p>
             <a:fld id="{779551AF-0EE3-DD4B-B4EF-6D8229EA0D86}" type="datetimeFigureOut">
               <a:rPr lang="en-US" smtClean="0"/>
-              <a:t>2/18/26</a:t>
+              <a:t>3/3/26</a:t>
             </a:fld>
             <a:endParaRPr lang="en-US"/>
           </a:p>
@@ -1505,7 +1505,7 @@
           <a:p>
             <a:fld id="{779551AF-0EE3-DD4B-B4EF-6D8229EA0D86}" type="datetimeFigureOut">
               <a:rPr lang="en-US" smtClean="0"/>
-              <a:t>2/18/26</a:t>
+              <a:t>3/3/26</a:t>
             </a:fld>
             <a:endParaRPr lang="en-US"/>
           </a:p>
@@ -1770,7 +1770,7 @@
           <a:p>
             <a:fld id="{779551AF-0EE3-DD4B-B4EF-6D8229EA0D86}" type="datetimeFigureOut">
               <a:rPr lang="en-US" smtClean="0"/>
-              <a:t>2/18/26</a:t>
+              <a:t>3/3/26</a:t>
             </a:fld>
             <a:endParaRPr lang="en-US"/>
           </a:p>
@@ -2182,7 +2182,7 @@
           <a:p>
             <a:fld id="{779551AF-0EE3-DD4B-B4EF-6D8229EA0D86}" type="datetimeFigureOut">
               <a:rPr lang="en-US" smtClean="0"/>
-              <a:t>2/18/26</a:t>
+              <a:t>3/3/26</a:t>
             </a:fld>
             <a:endParaRPr lang="en-US"/>
           </a:p>
@@ -2323,7 +2323,7 @@
           <a:p>
             <a:fld id="{779551AF-0EE3-DD4B-B4EF-6D8229EA0D86}" type="datetimeFigureOut">
               <a:rPr lang="en-US" smtClean="0"/>
-              <a:t>2/18/26</a:t>
+              <a:t>3/3/26</a:t>
             </a:fld>
             <a:endParaRPr lang="en-US"/>
           </a:p>
@@ -2436,7 +2436,7 @@
           <a:p>
             <a:fld id="{779551AF-0EE3-DD4B-B4EF-6D8229EA0D86}" type="datetimeFigureOut">
               <a:rPr lang="en-US" smtClean="0"/>
-              <a:t>2/18/26</a:t>
+              <a:t>3/3/26</a:t>
             </a:fld>
             <a:endParaRPr lang="en-US"/>
           </a:p>
@@ -2747,7 +2747,7 @@
           <a:p>
             <a:fld id="{779551AF-0EE3-DD4B-B4EF-6D8229EA0D86}" type="datetimeFigureOut">
               <a:rPr lang="en-US" smtClean="0"/>
-              <a:t>2/18/26</a:t>
+              <a:t>3/3/26</a:t>
             </a:fld>
             <a:endParaRPr lang="en-US"/>
           </a:p>
@@ -3035,7 +3035,7 @@
           <a:p>
             <a:fld id="{779551AF-0EE3-DD4B-B4EF-6D8229EA0D86}" type="datetimeFigureOut">
               <a:rPr lang="en-US" smtClean="0"/>
-              <a:t>2/18/26</a:t>
+              <a:t>3/3/26</a:t>
             </a:fld>
             <a:endParaRPr lang="en-US"/>
           </a:p>
@@ -3276,7 +3276,7 @@
           <a:p>
             <a:fld id="{779551AF-0EE3-DD4B-B4EF-6D8229EA0D86}" type="datetimeFigureOut">
               <a:rPr lang="en-US" smtClean="0"/>
-              <a:t>2/18/26</a:t>
+              <a:t>3/3/26</a:t>
             </a:fld>
             <a:endParaRPr lang="en-US"/>
           </a:p>
@@ -4805,7 +4805,7 @@
         <p:spPr>
           <a:xfrm>
             <a:off x="827186" y="1720840"/>
-            <a:ext cx="10537627" cy="3416320"/>
+            <a:ext cx="10537627" cy="4154984"/>
           </a:xfrm>
           <a:prstGeom prst="rect">
             <a:avLst/>
@@ -4879,6 +4879,16 @@
             <a:r>
               <a:rPr lang="en-US" sz="2400" dirty="0"/>
               <a:t> and have at least a brief awareness of the other parts of the project</a:t>
+            </a:r>
+          </a:p>
+          <a:p>
+            <a:pPr>
+              <a:buFont typeface="Wingdings" pitchFamily="2" charset="2"/>
+              <a:buChar char="Ø"/>
+            </a:pPr>
+            <a:r>
+              <a:rPr lang="en-US" sz="2400" dirty="0"/>
+              <a:t> You will propose your own project, and we’ll discuss and approve it together in the next lab</a:t>
             </a:r>
           </a:p>
           <a:p>

--- a/labs/Mobile-and-Embedded-Lab1.pptx
+++ b/labs/Mobile-and-Embedded-Lab1.pptx
@@ -5151,7 +5151,7 @@
             </a:pPr>
             <a:r>
               <a:rPr lang="en-US" sz="2400" dirty="0"/>
-              <a:t> Think of a project idea and form teams in a Google Sheet (with the following columns: Teammate 1, Teammate 2, Project Description)</a:t>
+              <a:t> Think of a project idea and form teams in the given Google Sheet</a:t>
             </a:r>
           </a:p>
           <a:p>
@@ -5225,6 +5225,16 @@
               <a:t>Websockets</a:t>
             </a:r>
             <a:endParaRPr lang="en-US" sz="2400" dirty="0"/>
+          </a:p>
+          <a:p>
+            <a:pPr lvl="1">
+              <a:buFont typeface="Wingdings" pitchFamily="2" charset="2"/>
+              <a:buChar char="Ø"/>
+            </a:pPr>
+            <a:r>
+              <a:rPr lang="en-US" sz="2400" dirty="0"/>
+              <a:t> Your project should have a medium-hard complexity</a:t>
+            </a:r>
           </a:p>
         </p:txBody>
       </p:sp>
@@ -5432,7 +5442,7 @@
         <p:spPr>
           <a:xfrm>
             <a:off x="903006" y="1541721"/>
-            <a:ext cx="10537627" cy="3970318"/>
+            <a:ext cx="10537627" cy="4401205"/>
           </a:xfrm>
           <a:prstGeom prst="rect">
             <a:avLst/>
@@ -5461,7 +5471,7 @@
             </a:pPr>
             <a:r>
               <a:rPr lang="en-US" sz="2800" dirty="0"/>
-              <a:t> You should install Flutter by following the documentation (</a:t>
+              <a:t> Install Flutter by following the documentation (</a:t>
             </a:r>
             <a:r>
               <a:rPr lang="en-US" sz="2800" dirty="0">
@@ -5481,7 +5491,7 @@
             </a:pPr>
             <a:r>
               <a:rPr lang="en-US" sz="2800" dirty="0"/>
-              <a:t> You will need Android Studio / Xcode</a:t>
+              <a:t> Android Studio / Xcode</a:t>
             </a:r>
           </a:p>
           <a:p>
@@ -5491,7 +5501,25 @@
             </a:pPr>
             <a:r>
               <a:rPr lang="en-US" sz="2800" dirty="0"/>
-              <a:t> You will need IntelliJ to write the code (with the Flutter and Dart plugins)</a:t>
+              <a:t>IntelliJ / </a:t>
+            </a:r>
+            <a:r>
+              <a:rPr lang="en-US" sz="2800" dirty="0" err="1"/>
+              <a:t>VSCode</a:t>
+            </a:r>
+            <a:r>
+              <a:rPr lang="en-US" sz="2800" dirty="0"/>
+              <a:t> to write the code (with the Flutter and Dart plugins)</a:t>
+            </a:r>
+          </a:p>
+          <a:p>
+            <a:pPr lvl="1">
+              <a:buFont typeface="Wingdings" pitchFamily="2" charset="2"/>
+              <a:buChar char="Ø"/>
+            </a:pPr>
+            <a:r>
+              <a:rPr lang="en-US" sz="2800" dirty="0"/>
+              <a:t> Configure Android / iOS emulators</a:t>
             </a:r>
           </a:p>
           <a:p>
@@ -5501,7 +5529,7 @@
             </a:pPr>
             <a:r>
               <a:rPr lang="en-US" sz="2800" dirty="0"/>
-              <a:t> Validate development environment by creating and running the default Flutter project</a:t>
+              <a:t> Validate development environment by creating and running the default Flutter project, it should open in your emulator</a:t>
             </a:r>
           </a:p>
         </p:txBody>

--- a/labs/Mobile-and-Embedded-Lab1.pptx
+++ b/labs/Mobile-and-Embedded-Lab1.pptx
@@ -4805,7 +4805,7 @@
         <p:spPr>
           <a:xfrm>
             <a:off x="827186" y="1720840"/>
-            <a:ext cx="10537627" cy="4154984"/>
+            <a:ext cx="10537627" cy="4524315"/>
           </a:xfrm>
           <a:prstGeom prst="rect">
             <a:avLst/>
@@ -4889,6 +4889,16 @@
             <a:r>
               <a:rPr lang="en-US" sz="2400" dirty="0"/>
               <a:t> You will propose your own project, and we’ll discuss and approve it together in the next lab</a:t>
+            </a:r>
+          </a:p>
+          <a:p>
+            <a:pPr>
+              <a:buFont typeface="Wingdings" pitchFamily="2" charset="2"/>
+              <a:buChar char="Ø"/>
+            </a:pPr>
+            <a:r>
+              <a:rPr lang="en-US" sz="2400" dirty="0"/>
+              <a:t> Teams of max 3 students</a:t>
             </a:r>
           </a:p>
           <a:p>

--- a/labs/Mobile-and-Embedded-Lab1.pptx
+++ b/labs/Mobile-and-Embedded-Lab1.pptx
@@ -5501,7 +5501,29 @@
             </a:pPr>
             <a:r>
               <a:rPr lang="en-US" sz="2800" dirty="0"/>
-              <a:t> Android Studio / Xcode</a:t>
+              <a:t> Android Studio / Xcode (</a:t>
+            </a:r>
+            <a:r>
+              <a:rPr lang="en-US" sz="2800" dirty="0">
+                <a:hlinkClick r:id="rId3"/>
+              </a:rPr>
+              <a:t>https://</a:t>
+            </a:r>
+            <a:r>
+              <a:rPr lang="en-US" sz="2800" dirty="0" err="1">
+                <a:hlinkClick r:id="rId3"/>
+              </a:rPr>
+              <a:t>developer.android.com</a:t>
+            </a:r>
+            <a:r>
+              <a:rPr lang="en-US" sz="2800" dirty="0">
+                <a:hlinkClick r:id="rId3"/>
+              </a:rPr>
+              <a:t>/studio</a:t>
+            </a:r>
+            <a:r>
+              <a:rPr lang="en-US" sz="2800" dirty="0"/>
+              <a:t>)</a:t>
             </a:r>
           </a:p>
           <a:p>
@@ -5510,8 +5532,14 @@
               <a:buChar char="Ø"/>
             </a:pPr>
             <a:r>
+              <a:rPr lang="en-US" sz="2800" dirty="0">
+                <a:hlinkClick r:id="rId4"/>
+              </a:rPr>
+              <a:t>IntelliJ</a:t>
+            </a:r>
+            <a:r>
               <a:rPr lang="en-US" sz="2800" dirty="0"/>
-              <a:t>IntelliJ / </a:t>
+              <a:t> / </a:t>
             </a:r>
             <a:r>
               <a:rPr lang="en-US" sz="2800" dirty="0" err="1"/>

--- a/labs/Mobile-and-Embedded-Lab1.pptx
+++ b/labs/Mobile-and-Embedded-Lab1.pptx
@@ -4749,7 +4749,7 @@
             </a:pPr>
             <a:r>
               <a:rPr lang="en-US" sz="2800" dirty="0"/>
-              <a:t>+ 1.5p Project (teams of two)</a:t>
+              <a:t>+ 1.5p Project (teams of maximum 3)</a:t>
             </a:r>
           </a:p>
         </p:txBody>

--- a/labs/Mobile-and-Embedded-Lab1.pptx
+++ b/labs/Mobile-and-Embedded-Lab1.pptx
@@ -212,7 +212,7 @@
           <a:p>
             <a:fld id="{03371807-75D2-4B48-9BC1-C0791C7EACC9}" type="datetimeFigureOut">
               <a:rPr lang="en-US" smtClean="0"/>
-              <a:t>3/3/26</a:t>
+              <a:t>3/24/26</a:t>
             </a:fld>
             <a:endParaRPr lang="en-US"/>
           </a:p>
@@ -626,7 +626,7 @@
           <a:p>
             <a:fld id="{779551AF-0EE3-DD4B-B4EF-6D8229EA0D86}" type="datetimeFigureOut">
               <a:rPr lang="en-US" smtClean="0"/>
-              <a:t>3/3/26</a:t>
+              <a:t>3/24/26</a:t>
             </a:fld>
             <a:endParaRPr lang="en-US"/>
           </a:p>
@@ -824,7 +824,7 @@
           <a:p>
             <a:fld id="{779551AF-0EE3-DD4B-B4EF-6D8229EA0D86}" type="datetimeFigureOut">
               <a:rPr lang="en-US" smtClean="0"/>
-              <a:t>3/3/26</a:t>
+              <a:t>3/24/26</a:t>
             </a:fld>
             <a:endParaRPr lang="en-US"/>
           </a:p>
@@ -1032,7 +1032,7 @@
           <a:p>
             <a:fld id="{779551AF-0EE3-DD4B-B4EF-6D8229EA0D86}" type="datetimeFigureOut">
               <a:rPr lang="en-US" smtClean="0"/>
-              <a:t>3/3/26</a:t>
+              <a:t>3/24/26</a:t>
             </a:fld>
             <a:endParaRPr lang="en-US"/>
           </a:p>
@@ -1230,7 +1230,7 @@
           <a:p>
             <a:fld id="{779551AF-0EE3-DD4B-B4EF-6D8229EA0D86}" type="datetimeFigureOut">
               <a:rPr lang="en-US" smtClean="0"/>
-              <a:t>3/3/26</a:t>
+              <a:t>3/24/26</a:t>
             </a:fld>
             <a:endParaRPr lang="en-US"/>
           </a:p>
@@ -1505,7 +1505,7 @@
           <a:p>
             <a:fld id="{779551AF-0EE3-DD4B-B4EF-6D8229EA0D86}" type="datetimeFigureOut">
               <a:rPr lang="en-US" smtClean="0"/>
-              <a:t>3/3/26</a:t>
+              <a:t>3/24/26</a:t>
             </a:fld>
             <a:endParaRPr lang="en-US"/>
           </a:p>
@@ -1770,7 +1770,7 @@
           <a:p>
             <a:fld id="{779551AF-0EE3-DD4B-B4EF-6D8229EA0D86}" type="datetimeFigureOut">
               <a:rPr lang="en-US" smtClean="0"/>
-              <a:t>3/3/26</a:t>
+              <a:t>3/24/26</a:t>
             </a:fld>
             <a:endParaRPr lang="en-US"/>
           </a:p>
@@ -2182,7 +2182,7 @@
           <a:p>
             <a:fld id="{779551AF-0EE3-DD4B-B4EF-6D8229EA0D86}" type="datetimeFigureOut">
               <a:rPr lang="en-US" smtClean="0"/>
-              <a:t>3/3/26</a:t>
+              <a:t>3/24/26</a:t>
             </a:fld>
             <a:endParaRPr lang="en-US"/>
           </a:p>
@@ -2323,7 +2323,7 @@
           <a:p>
             <a:fld id="{779551AF-0EE3-DD4B-B4EF-6D8229EA0D86}" type="datetimeFigureOut">
               <a:rPr lang="en-US" smtClean="0"/>
-              <a:t>3/3/26</a:t>
+              <a:t>3/24/26</a:t>
             </a:fld>
             <a:endParaRPr lang="en-US"/>
           </a:p>
@@ -2436,7 +2436,7 @@
           <a:p>
             <a:fld id="{779551AF-0EE3-DD4B-B4EF-6D8229EA0D86}" type="datetimeFigureOut">
               <a:rPr lang="en-US" smtClean="0"/>
-              <a:t>3/3/26</a:t>
+              <a:t>3/24/26</a:t>
             </a:fld>
             <a:endParaRPr lang="en-US"/>
           </a:p>
@@ -2747,7 +2747,7 @@
           <a:p>
             <a:fld id="{779551AF-0EE3-DD4B-B4EF-6D8229EA0D86}" type="datetimeFigureOut">
               <a:rPr lang="en-US" smtClean="0"/>
-              <a:t>3/3/26</a:t>
+              <a:t>3/24/26</a:t>
             </a:fld>
             <a:endParaRPr lang="en-US"/>
           </a:p>
@@ -3035,7 +3035,7 @@
           <a:p>
             <a:fld id="{779551AF-0EE3-DD4B-B4EF-6D8229EA0D86}" type="datetimeFigureOut">
               <a:rPr lang="en-US" smtClean="0"/>
-              <a:t>3/3/26</a:t>
+              <a:t>3/24/26</a:t>
             </a:fld>
             <a:endParaRPr lang="en-US"/>
           </a:p>
@@ -3276,7 +3276,7 @@
           <a:p>
             <a:fld id="{779551AF-0EE3-DD4B-B4EF-6D8229EA0D86}" type="datetimeFigureOut">
               <a:rPr lang="en-US" smtClean="0"/>
-              <a:t>3/3/26</a:t>
+              <a:t>3/24/26</a:t>
             </a:fld>
             <a:endParaRPr lang="en-US"/>
           </a:p>
@@ -3824,10 +3824,16 @@
               <a:buNone/>
             </a:pPr>
             <a:r>
+              <a:rPr lang="en-US" sz="3500" b="1">
+                <a:cs typeface="Al Bayan Plain" pitchFamily="2" charset="-78"/>
+              </a:rPr>
+              <a:t>Dinu-Ștefan RUSU 	</a:t>
+            </a:r>
+            <a:r>
               <a:rPr lang="en-US" sz="3500" b="1" dirty="0">
                 <a:cs typeface="Al Bayan Plain" pitchFamily="2" charset="-78"/>
               </a:rPr>
-              <a:t>Ing. Dinu-Ștefan RUSU 					</a:t>
+              <a:t>					</a:t>
             </a:r>
             <a:r>
               <a:rPr lang="en-US" dirty="0">

--- a/labs/Mobile-and-Embedded-Lab1.pptx
+++ b/labs/Mobile-and-Embedded-Lab1.pptx
@@ -212,7 +212,7 @@
           <a:p>
             <a:fld id="{03371807-75D2-4B48-9BC1-C0791C7EACC9}" type="datetimeFigureOut">
               <a:rPr lang="en-US" smtClean="0"/>
-              <a:t>3/24/26</a:t>
+              <a:t>5/4/26</a:t>
             </a:fld>
             <a:endParaRPr lang="en-US"/>
           </a:p>
@@ -626,7 +626,7 @@
           <a:p>
             <a:fld id="{779551AF-0EE3-DD4B-B4EF-6D8229EA0D86}" type="datetimeFigureOut">
               <a:rPr lang="en-US" smtClean="0"/>
-              <a:t>3/24/26</a:t>
+              <a:t>5/4/26</a:t>
             </a:fld>
             <a:endParaRPr lang="en-US"/>
           </a:p>
@@ -824,7 +824,7 @@
           <a:p>
             <a:fld id="{779551AF-0EE3-DD4B-B4EF-6D8229EA0D86}" type="datetimeFigureOut">
               <a:rPr lang="en-US" smtClean="0"/>
-              <a:t>3/24/26</a:t>
+              <a:t>5/4/26</a:t>
             </a:fld>
             <a:endParaRPr lang="en-US"/>
           </a:p>
@@ -1032,7 +1032,7 @@
           <a:p>
             <a:fld id="{779551AF-0EE3-DD4B-B4EF-6D8229EA0D86}" type="datetimeFigureOut">
               <a:rPr lang="en-US" smtClean="0"/>
-              <a:t>3/24/26</a:t>
+              <a:t>5/4/26</a:t>
             </a:fld>
             <a:endParaRPr lang="en-US"/>
           </a:p>
@@ -1230,7 +1230,7 @@
           <a:p>
             <a:fld id="{779551AF-0EE3-DD4B-B4EF-6D8229EA0D86}" type="datetimeFigureOut">
               <a:rPr lang="en-US" smtClean="0"/>
-              <a:t>3/24/26</a:t>
+              <a:t>5/4/26</a:t>
             </a:fld>
             <a:endParaRPr lang="en-US"/>
           </a:p>
@@ -1505,7 +1505,7 @@
           <a:p>
             <a:fld id="{779551AF-0EE3-DD4B-B4EF-6D8229EA0D86}" type="datetimeFigureOut">
               <a:rPr lang="en-US" smtClean="0"/>
-              <a:t>3/24/26</a:t>
+              <a:t>5/4/26</a:t>
             </a:fld>
             <a:endParaRPr lang="en-US"/>
           </a:p>
@@ -1770,7 +1770,7 @@
           <a:p>
             <a:fld id="{779551AF-0EE3-DD4B-B4EF-6D8229EA0D86}" type="datetimeFigureOut">
               <a:rPr lang="en-US" smtClean="0"/>
-              <a:t>3/24/26</a:t>
+              <a:t>5/4/26</a:t>
             </a:fld>
             <a:endParaRPr lang="en-US"/>
           </a:p>
@@ -2182,7 +2182,7 @@
           <a:p>
             <a:fld id="{779551AF-0EE3-DD4B-B4EF-6D8229EA0D86}" type="datetimeFigureOut">
               <a:rPr lang="en-US" smtClean="0"/>
-              <a:t>3/24/26</a:t>
+              <a:t>5/4/26</a:t>
             </a:fld>
             <a:endParaRPr lang="en-US"/>
           </a:p>
@@ -2323,7 +2323,7 @@
           <a:p>
             <a:fld id="{779551AF-0EE3-DD4B-B4EF-6D8229EA0D86}" type="datetimeFigureOut">
               <a:rPr lang="en-US" smtClean="0"/>
-              <a:t>3/24/26</a:t>
+              <a:t>5/4/26</a:t>
             </a:fld>
             <a:endParaRPr lang="en-US"/>
           </a:p>
@@ -2436,7 +2436,7 @@
           <a:p>
             <a:fld id="{779551AF-0EE3-DD4B-B4EF-6D8229EA0D86}" type="datetimeFigureOut">
               <a:rPr lang="en-US" smtClean="0"/>
-              <a:t>3/24/26</a:t>
+              <a:t>5/4/26</a:t>
             </a:fld>
             <a:endParaRPr lang="en-US"/>
           </a:p>
@@ -2747,7 +2747,7 @@
           <a:p>
             <a:fld id="{779551AF-0EE3-DD4B-B4EF-6D8229EA0D86}" type="datetimeFigureOut">
               <a:rPr lang="en-US" smtClean="0"/>
-              <a:t>3/24/26</a:t>
+              <a:t>5/4/26</a:t>
             </a:fld>
             <a:endParaRPr lang="en-US"/>
           </a:p>
@@ -3035,7 +3035,7 @@
           <a:p>
             <a:fld id="{779551AF-0EE3-DD4B-B4EF-6D8229EA0D86}" type="datetimeFigureOut">
               <a:rPr lang="en-US" smtClean="0"/>
-              <a:t>3/24/26</a:t>
+              <a:t>5/4/26</a:t>
             </a:fld>
             <a:endParaRPr lang="en-US"/>
           </a:p>
@@ -3276,7 +3276,7 @@
           <a:p>
             <a:fld id="{779551AF-0EE3-DD4B-B4EF-6D8229EA0D86}" type="datetimeFigureOut">
               <a:rPr lang="en-US" smtClean="0"/>
-              <a:t>3/24/26</a:t>
+              <a:t>5/4/26</a:t>
             </a:fld>
             <a:endParaRPr lang="en-US"/>
           </a:p>
@@ -4995,8 +4995,8 @@
         </p:nvSpPr>
         <p:spPr>
           <a:xfrm>
-            <a:off x="827186" y="1720840"/>
-            <a:ext cx="10537627" cy="3416320"/>
+            <a:off x="827186" y="1351508"/>
+            <a:ext cx="10537627" cy="4154984"/>
           </a:xfrm>
           <a:prstGeom prst="rect">
             <a:avLst/>
@@ -5060,6 +5060,32 @@
             <a:r>
               <a:rPr lang="en-US" sz="2400" dirty="0"/>
               <a:t>of the implemented app (what it does, what ‘screens’ it has,  etc.)</a:t>
+            </a:r>
+          </a:p>
+          <a:p>
+            <a:pPr lvl="1">
+              <a:buFont typeface="Wingdings" pitchFamily="2" charset="2"/>
+              <a:buChar char="Ø"/>
+            </a:pPr>
+            <a:r>
+              <a:rPr lang="en-US" sz="2400" dirty="0"/>
+              <a:t> </a:t>
+            </a:r>
+            <a:r>
+              <a:rPr lang="en-US" sz="2400" b="1" dirty="0"/>
+              <a:t>Link to the public GitHub repository </a:t>
+            </a:r>
+            <a:r>
+              <a:rPr lang="en-US" sz="2400" dirty="0"/>
+              <a:t>(or if you chose to make the repo private, make sure to invite me as a collaborator, my username is: </a:t>
+            </a:r>
+            <a:r>
+              <a:rPr lang="en-US" sz="2400" dirty="0" err="1"/>
+              <a:t>rusudinu</a:t>
+            </a:r>
+            <a:r>
+              <a:rPr lang="en-US" sz="2400" dirty="0"/>
+              <a:t>)</a:t>
             </a:r>
           </a:p>
           <a:p>

--- a/labs/Mobile-and-Embedded-Lab1.pptx
+++ b/labs/Mobile-and-Embedded-Lab1.pptx
@@ -12,8 +12,8 @@
     <p:sldId id="258" r:id="rId3"/>
     <p:sldId id="261" r:id="rId4"/>
     <p:sldId id="289" r:id="rId5"/>
-    <p:sldId id="290" r:id="rId6"/>
-    <p:sldId id="291" r:id="rId7"/>
+    <p:sldId id="291" r:id="rId6"/>
+    <p:sldId id="290" r:id="rId7"/>
     <p:sldId id="287" r:id="rId8"/>
     <p:sldId id="288" r:id="rId9"/>
   </p:sldIdLst>
@@ -212,7 +212,7 @@
           <a:p>
             <a:fld id="{03371807-75D2-4B48-9BC1-C0791C7EACC9}" type="datetimeFigureOut">
               <a:rPr lang="en-US" smtClean="0"/>
-              <a:t>5/4/26</a:t>
+              <a:t>5/6/26</a:t>
             </a:fld>
             <a:endParaRPr lang="en-US"/>
           </a:p>
@@ -626,7 +626,7 @@
           <a:p>
             <a:fld id="{779551AF-0EE3-DD4B-B4EF-6D8229EA0D86}" type="datetimeFigureOut">
               <a:rPr lang="en-US" smtClean="0"/>
-              <a:t>5/4/26</a:t>
+              <a:t>5/6/26</a:t>
             </a:fld>
             <a:endParaRPr lang="en-US"/>
           </a:p>
@@ -824,7 +824,7 @@
           <a:p>
             <a:fld id="{779551AF-0EE3-DD4B-B4EF-6D8229EA0D86}" type="datetimeFigureOut">
               <a:rPr lang="en-US" smtClean="0"/>
-              <a:t>5/4/26</a:t>
+              <a:t>5/6/26</a:t>
             </a:fld>
             <a:endParaRPr lang="en-US"/>
           </a:p>
@@ -1032,7 +1032,7 @@
           <a:p>
             <a:fld id="{779551AF-0EE3-DD4B-B4EF-6D8229EA0D86}" type="datetimeFigureOut">
               <a:rPr lang="en-US" smtClean="0"/>
-              <a:t>5/4/26</a:t>
+              <a:t>5/6/26</a:t>
             </a:fld>
             <a:endParaRPr lang="en-US"/>
           </a:p>
@@ -1230,7 +1230,7 @@
           <a:p>
             <a:fld id="{779551AF-0EE3-DD4B-B4EF-6D8229EA0D86}" type="datetimeFigureOut">
               <a:rPr lang="en-US" smtClean="0"/>
-              <a:t>5/4/26</a:t>
+              <a:t>5/6/26</a:t>
             </a:fld>
             <a:endParaRPr lang="en-US"/>
           </a:p>
@@ -1505,7 +1505,7 @@
           <a:p>
             <a:fld id="{779551AF-0EE3-DD4B-B4EF-6D8229EA0D86}" type="datetimeFigureOut">
               <a:rPr lang="en-US" smtClean="0"/>
-              <a:t>5/4/26</a:t>
+              <a:t>5/6/26</a:t>
             </a:fld>
             <a:endParaRPr lang="en-US"/>
           </a:p>
@@ -1770,7 +1770,7 @@
           <a:p>
             <a:fld id="{779551AF-0EE3-DD4B-B4EF-6D8229EA0D86}" type="datetimeFigureOut">
               <a:rPr lang="en-US" smtClean="0"/>
-              <a:t>5/4/26</a:t>
+              <a:t>5/6/26</a:t>
             </a:fld>
             <a:endParaRPr lang="en-US"/>
           </a:p>
@@ -2182,7 +2182,7 @@
           <a:p>
             <a:fld id="{779551AF-0EE3-DD4B-B4EF-6D8229EA0D86}" type="datetimeFigureOut">
               <a:rPr lang="en-US" smtClean="0"/>
-              <a:t>5/4/26</a:t>
+              <a:t>5/6/26</a:t>
             </a:fld>
             <a:endParaRPr lang="en-US"/>
           </a:p>
@@ -2323,7 +2323,7 @@
           <a:p>
             <a:fld id="{779551AF-0EE3-DD4B-B4EF-6D8229EA0D86}" type="datetimeFigureOut">
               <a:rPr lang="en-US" smtClean="0"/>
-              <a:t>5/4/26</a:t>
+              <a:t>5/6/26</a:t>
             </a:fld>
             <a:endParaRPr lang="en-US"/>
           </a:p>
@@ -2436,7 +2436,7 @@
           <a:p>
             <a:fld id="{779551AF-0EE3-DD4B-B4EF-6D8229EA0D86}" type="datetimeFigureOut">
               <a:rPr lang="en-US" smtClean="0"/>
-              <a:t>5/4/26</a:t>
+              <a:t>5/6/26</a:t>
             </a:fld>
             <a:endParaRPr lang="en-US"/>
           </a:p>
@@ -2747,7 +2747,7 @@
           <a:p>
             <a:fld id="{779551AF-0EE3-DD4B-B4EF-6D8229EA0D86}" type="datetimeFigureOut">
               <a:rPr lang="en-US" smtClean="0"/>
-              <a:t>5/4/26</a:t>
+              <a:t>5/6/26</a:t>
             </a:fld>
             <a:endParaRPr lang="en-US"/>
           </a:p>
@@ -3035,7 +3035,7 @@
           <a:p>
             <a:fld id="{779551AF-0EE3-DD4B-B4EF-6D8229EA0D86}" type="datetimeFigureOut">
               <a:rPr lang="en-US" smtClean="0"/>
-              <a:t>5/4/26</a:t>
+              <a:t>5/6/26</a:t>
             </a:fld>
             <a:endParaRPr lang="en-US"/>
           </a:p>
@@ -3276,7 +3276,7 @@
           <a:p>
             <a:fld id="{779551AF-0EE3-DD4B-B4EF-6D8229EA0D86}" type="datetimeFigureOut">
               <a:rPr lang="en-US" smtClean="0"/>
-              <a:t>5/4/26</a:t>
+              <a:t>5/6/26</a:t>
             </a:fld>
             <a:endParaRPr lang="en-US"/>
           </a:p>
@@ -3754,7 +3754,7 @@
           <a:p>
             <a:r>
               <a:rPr lang="en-US" b="1" dirty="0"/>
-              <a:t>Laboratory 1. Orientation &amp; Set-up</a:t>
+              <a:t>Laboratory 1. Orientation, Set-up &amp; Project</a:t>
             </a:r>
           </a:p>
           <a:p>
@@ -4811,7 +4811,7 @@
         <p:spPr>
           <a:xfrm>
             <a:off x="827186" y="1720840"/>
-            <a:ext cx="10537627" cy="4524315"/>
+            <a:ext cx="10537627" cy="5262979"/>
           </a:xfrm>
           <a:prstGeom prst="rect">
             <a:avLst/>
@@ -4903,8 +4903,28 @@
               <a:buChar char="Ø"/>
             </a:pPr>
             <a:r>
+              <a:rPr lang="en-US" dirty="0"/>
+              <a:t> </a:t>
+            </a:r>
+            <a:r>
               <a:rPr lang="en-US" sz="2400" dirty="0"/>
-              <a:t> Teams of max 3 students</a:t>
+              <a:t>All your presentation materials should be uploaded on Moodle in the</a:t>
+            </a:r>
+          </a:p>
+          <a:p>
+            <a:r>
+              <a:rPr lang="en-US" sz="2400" dirty="0"/>
+              <a:t>designated space</a:t>
+            </a:r>
+          </a:p>
+          <a:p>
+            <a:pPr>
+              <a:buFont typeface="Wingdings" pitchFamily="2" charset="2"/>
+              <a:buChar char="Ø"/>
+            </a:pPr>
+            <a:r>
+              <a:rPr lang="en-US" sz="2400" dirty="0"/>
+              <a:t>Teams of max 3 students</a:t>
             </a:r>
           </a:p>
           <a:p>
@@ -4940,7 +4960,7 @@
           <a:p>
             <a:r>
               <a:rPr lang="en-US" dirty="0"/>
-              <a:t>Project details</a:t>
+              <a:t>Project details &amp; deliverables</a:t>
             </a:r>
           </a:p>
         </p:txBody>
@@ -4959,6 +4979,169 @@
 </file>
 
 <file path=ppt/slides/slide5.xml><?xml version="1.0" encoding="utf-8"?>
+<p:sld xmlns:a="http://schemas.openxmlformats.org/drawingml/2006/main" xmlns:r="http://schemas.openxmlformats.org/officeDocument/2006/relationships" xmlns:p="http://schemas.openxmlformats.org/presentationml/2006/main">
+  <p:cSld>
+    <p:spTree>
+      <p:nvGrpSpPr>
+        <p:cNvPr id="1" name="">
+          <a:extLst>
+            <a:ext uri="{FF2B5EF4-FFF2-40B4-BE49-F238E27FC236}">
+              <a16:creationId xmlns:a16="http://schemas.microsoft.com/office/drawing/2014/main" id="{010D2B6E-47F7-E296-2BF9-5C0ED4335B47}"/>
+            </a:ext>
+          </a:extLst>
+        </p:cNvPr>
+        <p:cNvGrpSpPr/>
+        <p:nvPr/>
+      </p:nvGrpSpPr>
+      <p:grpSpPr>
+        <a:xfrm>
+          <a:off x="0" y="0"/>
+          <a:ext cx="0" cy="0"/>
+          <a:chOff x="0" y="0"/>
+          <a:chExt cx="0" cy="0"/>
+        </a:xfrm>
+      </p:grpSpPr>
+      <p:sp>
+        <p:nvSpPr>
+          <p:cNvPr id="5" name="TextBox 4">
+            <a:extLst>
+              <a:ext uri="{FF2B5EF4-FFF2-40B4-BE49-F238E27FC236}">
+                <a16:creationId xmlns:a16="http://schemas.microsoft.com/office/drawing/2014/main" id="{D8FFC404-388D-059A-92C4-2216AB771D46}"/>
+              </a:ext>
+            </a:extLst>
+          </p:cNvPr>
+          <p:cNvSpPr txBox="1"/>
+          <p:nvPr/>
+        </p:nvSpPr>
+        <p:spPr>
+          <a:xfrm>
+            <a:off x="827186" y="1166842"/>
+            <a:ext cx="10537627" cy="4524315"/>
+          </a:xfrm>
+          <a:prstGeom prst="rect">
+            <a:avLst/>
+          </a:prstGeom>
+          <a:noFill/>
+        </p:spPr>
+        <p:txBody>
+          <a:bodyPr wrap="square" rtlCol="0">
+            <a:spAutoFit/>
+          </a:bodyPr>
+          <a:lstStyle/>
+          <a:p>
+            <a:pPr>
+              <a:buFont typeface="Wingdings" pitchFamily="2" charset="2"/>
+              <a:buChar char="Ø"/>
+            </a:pPr>
+            <a:r>
+              <a:rPr lang="en-US" sz="2400" dirty="0"/>
+              <a:t> Think of a project idea and form teams in the given Google Sheet</a:t>
+            </a:r>
+          </a:p>
+          <a:p>
+            <a:pPr>
+              <a:buFont typeface="Wingdings" pitchFamily="2" charset="2"/>
+              <a:buChar char="Ø"/>
+            </a:pPr>
+            <a:r>
+              <a:rPr lang="en-US" sz="2400" dirty="0"/>
+              <a:t> After forming the teams and writing a description in the doc we will have a discussion to validate its complexity</a:t>
+            </a:r>
+          </a:p>
+          <a:p>
+            <a:pPr>
+              <a:buFont typeface="Wingdings" pitchFamily="2" charset="2"/>
+              <a:buChar char="Ø"/>
+            </a:pPr>
+            <a:r>
+              <a:rPr lang="en-US" sz="2400" dirty="0"/>
+              <a:t> Your project should have a medium-hard complexity</a:t>
+            </a:r>
+          </a:p>
+          <a:p>
+            <a:pPr>
+              <a:buFont typeface="Wingdings" pitchFamily="2" charset="2"/>
+              <a:buChar char="Ø"/>
+            </a:pPr>
+            <a:endParaRPr lang="en-US" sz="2400" dirty="0"/>
+          </a:p>
+          <a:p>
+            <a:r>
+              <a:rPr lang="en-US" sz="2400" dirty="0"/>
+              <a:t>Your project must at least have the following:</a:t>
+            </a:r>
+          </a:p>
+          <a:p>
+            <a:pPr lvl="1">
+              <a:buFont typeface="Wingdings" pitchFamily="2" charset="2"/>
+              <a:buChar char="Ø"/>
+            </a:pPr>
+            <a:r>
+              <a:rPr lang="en-US" sz="2400" dirty="0"/>
+              <a:t> State management using BLoC</a:t>
+            </a:r>
+          </a:p>
+          <a:p>
+            <a:pPr lvl="1">
+              <a:buFont typeface="Wingdings" pitchFamily="2" charset="2"/>
+              <a:buChar char="Ø"/>
+            </a:pPr>
+            <a:r>
+              <a:rPr lang="en-US" sz="2400" dirty="0"/>
+              <a:t> Authentication (Firebase Auth / Keycloak / anything that is ‘real’ auth)</a:t>
+            </a:r>
+          </a:p>
+          <a:p>
+            <a:pPr lvl="1">
+              <a:buFont typeface="Wingdings" pitchFamily="2" charset="2"/>
+              <a:buChar char="Ø"/>
+            </a:pPr>
+            <a:r>
+              <a:rPr lang="en-US" sz="2400" dirty="0"/>
+              <a:t> Data persistence (any kind of database) and offline first capabilities</a:t>
+            </a:r>
+          </a:p>
+          <a:p>
+            <a:pPr lvl="1">
+              <a:buFont typeface="Wingdings" pitchFamily="2" charset="2"/>
+              <a:buChar char="Ø"/>
+            </a:pPr>
+            <a:r>
+              <a:rPr lang="en-US" sz="2400" dirty="0"/>
+              <a:t> When logging in on a different device, user’s data should be loaded/transferred automatically</a:t>
+            </a:r>
+          </a:p>
+          <a:p>
+            <a:pPr lvl="1">
+              <a:buFont typeface="Wingdings" pitchFamily="2" charset="2"/>
+              <a:buChar char="Ø"/>
+            </a:pPr>
+            <a:r>
+              <a:rPr lang="en-US" sz="2400" dirty="0"/>
+              <a:t> Realtime capabilities using </a:t>
+            </a:r>
+            <a:r>
+              <a:rPr lang="en-US" sz="2400" dirty="0" err="1"/>
+              <a:t>Websockets</a:t>
+            </a:r>
+            <a:endParaRPr lang="en-US" sz="2400" dirty="0"/>
+          </a:p>
+        </p:txBody>
+      </p:sp>
+    </p:spTree>
+    <p:extLst>
+      <p:ext uri="{BB962C8B-B14F-4D97-AF65-F5344CB8AC3E}">
+        <p14:creationId xmlns:p14="http://schemas.microsoft.com/office/powerpoint/2010/main" val="481490178"/>
+      </p:ext>
+    </p:extLst>
+  </p:cSld>
+  <p:clrMapOvr>
+    <a:masterClrMapping/>
+  </p:clrMapOvr>
+</p:sld>
+</file>
+
+<file path=ppt/slides/slide6.xml><?xml version="1.0" encoding="utf-8"?>
 <p:sld xmlns:a="http://schemas.openxmlformats.org/drawingml/2006/main" xmlns:r="http://schemas.openxmlformats.org/officeDocument/2006/relationships" xmlns:p="http://schemas.openxmlformats.org/presentationml/2006/main">
   <p:cSld>
     <p:spTree>
@@ -5015,7 +5198,7 @@
             </a:pPr>
             <a:r>
               <a:rPr lang="en-US" sz="2400" dirty="0"/>
-              <a:t>The readme MUST contain the following sections (in this order):</a:t>
+              <a:t> The readme MUST contain the following sections (in this order):</a:t>
             </a:r>
           </a:p>
           <a:p>
@@ -5127,196 +5310,6 @@
     <p:extLst>
       <p:ext uri="{BB962C8B-B14F-4D97-AF65-F5344CB8AC3E}">
         <p14:creationId xmlns:p14="http://schemas.microsoft.com/office/powerpoint/2010/main" val="2345152578"/>
-      </p:ext>
-    </p:extLst>
-  </p:cSld>
-  <p:clrMapOvr>
-    <a:masterClrMapping/>
-  </p:clrMapOvr>
-</p:sld>
-</file>
-
-<file path=ppt/slides/slide6.xml><?xml version="1.0" encoding="utf-8"?>
-<p:sld xmlns:a="http://schemas.openxmlformats.org/drawingml/2006/main" xmlns:r="http://schemas.openxmlformats.org/officeDocument/2006/relationships" xmlns:p="http://schemas.openxmlformats.org/presentationml/2006/main">
-  <p:cSld>
-    <p:spTree>
-      <p:nvGrpSpPr>
-        <p:cNvPr id="1" name="">
-          <a:extLst>
-            <a:ext uri="{FF2B5EF4-FFF2-40B4-BE49-F238E27FC236}">
-              <a16:creationId xmlns:a16="http://schemas.microsoft.com/office/drawing/2014/main" id="{010D2B6E-47F7-E296-2BF9-5C0ED4335B47}"/>
-            </a:ext>
-          </a:extLst>
-        </p:cNvPr>
-        <p:cNvGrpSpPr/>
-        <p:nvPr/>
-      </p:nvGrpSpPr>
-      <p:grpSpPr>
-        <a:xfrm>
-          <a:off x="0" y="0"/>
-          <a:ext cx="0" cy="0"/>
-          <a:chOff x="0" y="0"/>
-          <a:chExt cx="0" cy="0"/>
-        </a:xfrm>
-      </p:grpSpPr>
-      <p:sp>
-        <p:nvSpPr>
-          <p:cNvPr id="5" name="TextBox 4">
-            <a:extLst>
-              <a:ext uri="{FF2B5EF4-FFF2-40B4-BE49-F238E27FC236}">
-                <a16:creationId xmlns:a16="http://schemas.microsoft.com/office/drawing/2014/main" id="{D8FFC404-388D-059A-92C4-2216AB771D46}"/>
-              </a:ext>
-            </a:extLst>
-          </p:cNvPr>
-          <p:cNvSpPr txBox="1"/>
-          <p:nvPr/>
-        </p:nvSpPr>
-        <p:spPr>
-          <a:xfrm>
-            <a:off x="838200" y="2213246"/>
-            <a:ext cx="10537627" cy="3785652"/>
-          </a:xfrm>
-          <a:prstGeom prst="rect">
-            <a:avLst/>
-          </a:prstGeom>
-          <a:noFill/>
-        </p:spPr>
-        <p:txBody>
-          <a:bodyPr wrap="square" rtlCol="0">
-            <a:spAutoFit/>
-          </a:bodyPr>
-          <a:lstStyle/>
-          <a:p>
-            <a:pPr>
-              <a:buFont typeface="Wingdings" pitchFamily="2" charset="2"/>
-              <a:buChar char="Ø"/>
-            </a:pPr>
-            <a:r>
-              <a:rPr lang="en-US" sz="2400" dirty="0"/>
-              <a:t> Think of a project idea and form teams in the given Google Sheet</a:t>
-            </a:r>
-          </a:p>
-          <a:p>
-            <a:pPr>
-              <a:buFont typeface="Wingdings" pitchFamily="2" charset="2"/>
-              <a:buChar char="Ø"/>
-            </a:pPr>
-            <a:r>
-              <a:rPr lang="en-US" sz="2400" dirty="0"/>
-              <a:t> After forming the teams and writing a consistent description in the doc we will have a discussion to validate its complexity</a:t>
-            </a:r>
-          </a:p>
-          <a:p>
-            <a:pPr>
-              <a:buFont typeface="Wingdings" pitchFamily="2" charset="2"/>
-              <a:buChar char="Ø"/>
-            </a:pPr>
-            <a:endParaRPr lang="en-US" sz="2400" dirty="0"/>
-          </a:p>
-          <a:p>
-            <a:pPr>
-              <a:buFont typeface="Wingdings" pitchFamily="2" charset="2"/>
-              <a:buChar char="Ø"/>
-            </a:pPr>
-            <a:r>
-              <a:rPr lang="en-US" sz="2400" dirty="0"/>
-              <a:t> Your project must at least have the following:</a:t>
-            </a:r>
-          </a:p>
-          <a:p>
-            <a:pPr lvl="1">
-              <a:buFont typeface="Wingdings" pitchFamily="2" charset="2"/>
-              <a:buChar char="Ø"/>
-            </a:pPr>
-            <a:r>
-              <a:rPr lang="en-US" sz="2400" dirty="0"/>
-              <a:t> State management using BLoC</a:t>
-            </a:r>
-          </a:p>
-          <a:p>
-            <a:pPr lvl="1">
-              <a:buFont typeface="Wingdings" pitchFamily="2" charset="2"/>
-              <a:buChar char="Ø"/>
-            </a:pPr>
-            <a:r>
-              <a:rPr lang="en-US" sz="2400" dirty="0"/>
-              <a:t> Authentication</a:t>
-            </a:r>
-          </a:p>
-          <a:p>
-            <a:pPr lvl="1">
-              <a:buFont typeface="Wingdings" pitchFamily="2" charset="2"/>
-              <a:buChar char="Ø"/>
-            </a:pPr>
-            <a:r>
-              <a:rPr lang="en-US" sz="2400" dirty="0"/>
-              <a:t> Data persistence (any kind of database) and offline first capabilities</a:t>
-            </a:r>
-          </a:p>
-          <a:p>
-            <a:pPr lvl="1">
-              <a:buFont typeface="Wingdings" pitchFamily="2" charset="2"/>
-              <a:buChar char="Ø"/>
-            </a:pPr>
-            <a:r>
-              <a:rPr lang="en-US" sz="2400" dirty="0"/>
-              <a:t> Realtime capabilities using </a:t>
-            </a:r>
-            <a:r>
-              <a:rPr lang="en-US" sz="2400" dirty="0" err="1"/>
-              <a:t>Websockets</a:t>
-            </a:r>
-            <a:endParaRPr lang="en-US" sz="2400" dirty="0"/>
-          </a:p>
-          <a:p>
-            <a:pPr lvl="1">
-              <a:buFont typeface="Wingdings" pitchFamily="2" charset="2"/>
-              <a:buChar char="Ø"/>
-            </a:pPr>
-            <a:r>
-              <a:rPr lang="en-US" sz="2400" dirty="0"/>
-              <a:t> Your project should have a medium-hard complexity</a:t>
-            </a:r>
-          </a:p>
-        </p:txBody>
-      </p:sp>
-      <p:sp>
-        <p:nvSpPr>
-          <p:cNvPr id="2" name="Title 1">
-            <a:extLst>
-              <a:ext uri="{FF2B5EF4-FFF2-40B4-BE49-F238E27FC236}">
-                <a16:creationId xmlns:a16="http://schemas.microsoft.com/office/drawing/2014/main" id="{F701C72E-F8D1-87D9-2A1B-765D77FC37BD}"/>
-              </a:ext>
-            </a:extLst>
-          </p:cNvPr>
-          <p:cNvSpPr>
-            <a:spLocks noGrp="1"/>
-          </p:cNvSpPr>
-          <p:nvPr>
-            <p:ph type="title"/>
-          </p:nvPr>
-        </p:nvSpPr>
-        <p:spPr>
-          <a:xfrm>
-            <a:off x="838200" y="365125"/>
-            <a:ext cx="10515600" cy="1325563"/>
-          </a:xfrm>
-        </p:spPr>
-        <p:txBody>
-          <a:bodyPr/>
-          <a:lstStyle/>
-          <a:p>
-            <a:r>
-              <a:rPr lang="en-US" dirty="0"/>
-              <a:t>Project guidelines</a:t>
-            </a:r>
-          </a:p>
-        </p:txBody>
-      </p:sp>
-    </p:spTree>
-    <p:extLst>
-      <p:ext uri="{BB962C8B-B14F-4D97-AF65-F5344CB8AC3E}">
-        <p14:creationId xmlns:p14="http://schemas.microsoft.com/office/powerpoint/2010/main" val="481490178"/>
       </p:ext>
     </p:extLst>
   </p:cSld>

--- a/labs/Mobile-and-Embedded-Lab1.pptx
+++ b/labs/Mobile-and-Embedded-Lab1.pptx
@@ -4810,8 +4810,8 @@
         </p:nvSpPr>
         <p:spPr>
           <a:xfrm>
-            <a:off x="827186" y="1720840"/>
-            <a:ext cx="10537627" cy="5262979"/>
+            <a:off x="838200" y="1452392"/>
+            <a:ext cx="10537627" cy="5632311"/>
           </a:xfrm>
           <a:prstGeom prst="rect">
             <a:avLst/>
@@ -4903,12 +4903,8 @@
               <a:buChar char="Ø"/>
             </a:pPr>
             <a:r>
-              <a:rPr lang="en-US" dirty="0"/>
-              <a:t> </a:t>
-            </a:r>
-            <a:r>
               <a:rPr lang="en-US" sz="2400" dirty="0"/>
-              <a:t>All your presentation materials should be uploaded on Moodle in the</a:t>
+              <a:t> All your presentation materials should be uploaded on Moodle in the</a:t>
             </a:r>
           </a:p>
           <a:p>
@@ -4925,6 +4921,16 @@
             <a:r>
               <a:rPr lang="en-US" sz="2400" dirty="0"/>
               <a:t>Teams of max 3 students</a:t>
+            </a:r>
+          </a:p>
+          <a:p>
+            <a:pPr>
+              <a:buFont typeface="Wingdings" pitchFamily="2" charset="2"/>
+              <a:buChar char="Ø"/>
+            </a:pPr>
+            <a:r>
+              <a:rPr lang="en-US" sz="2400" dirty="0"/>
+              <a:t> You will present from your own laptop, at the projector</a:t>
             </a:r>
           </a:p>
           <a:p>

--- a/labs/Mobile-and-Embedded-Lab1.pptx
+++ b/labs/Mobile-and-Embedded-Lab1.pptx
@@ -212,7 +212,7 @@
           <a:p>
             <a:fld id="{03371807-75D2-4B48-9BC1-C0791C7EACC9}" type="datetimeFigureOut">
               <a:rPr lang="en-US" smtClean="0"/>
-              <a:t>5/6/26</a:t>
+              <a:t>5/8/26</a:t>
             </a:fld>
             <a:endParaRPr lang="en-US"/>
           </a:p>
@@ -626,7 +626,7 @@
           <a:p>
             <a:fld id="{779551AF-0EE3-DD4B-B4EF-6D8229EA0D86}" type="datetimeFigureOut">
               <a:rPr lang="en-US" smtClean="0"/>
-              <a:t>5/6/26</a:t>
+              <a:t>5/8/26</a:t>
             </a:fld>
             <a:endParaRPr lang="en-US"/>
           </a:p>
@@ -824,7 +824,7 @@
           <a:p>
             <a:fld id="{779551AF-0EE3-DD4B-B4EF-6D8229EA0D86}" type="datetimeFigureOut">
               <a:rPr lang="en-US" smtClean="0"/>
-              <a:t>5/6/26</a:t>
+              <a:t>5/8/26</a:t>
             </a:fld>
             <a:endParaRPr lang="en-US"/>
           </a:p>
@@ -1032,7 +1032,7 @@
           <a:p>
             <a:fld id="{779551AF-0EE3-DD4B-B4EF-6D8229EA0D86}" type="datetimeFigureOut">
               <a:rPr lang="en-US" smtClean="0"/>
-              <a:t>5/6/26</a:t>
+              <a:t>5/8/26</a:t>
             </a:fld>
             <a:endParaRPr lang="en-US"/>
           </a:p>
@@ -1230,7 +1230,7 @@
           <a:p>
             <a:fld id="{779551AF-0EE3-DD4B-B4EF-6D8229EA0D86}" type="datetimeFigureOut">
               <a:rPr lang="en-US" smtClean="0"/>
-              <a:t>5/6/26</a:t>
+              <a:t>5/8/26</a:t>
             </a:fld>
             <a:endParaRPr lang="en-US"/>
           </a:p>
@@ -1505,7 +1505,7 @@
           <a:p>
             <a:fld id="{779551AF-0EE3-DD4B-B4EF-6D8229EA0D86}" type="datetimeFigureOut">
               <a:rPr lang="en-US" smtClean="0"/>
-              <a:t>5/6/26</a:t>
+              <a:t>5/8/26</a:t>
             </a:fld>
             <a:endParaRPr lang="en-US"/>
           </a:p>
@@ -1770,7 +1770,7 @@
           <a:p>
             <a:fld id="{779551AF-0EE3-DD4B-B4EF-6D8229EA0D86}" type="datetimeFigureOut">
               <a:rPr lang="en-US" smtClean="0"/>
-              <a:t>5/6/26</a:t>
+              <a:t>5/8/26</a:t>
             </a:fld>
             <a:endParaRPr lang="en-US"/>
           </a:p>
@@ -2182,7 +2182,7 @@
           <a:p>
             <a:fld id="{779551AF-0EE3-DD4B-B4EF-6D8229EA0D86}" type="datetimeFigureOut">
               <a:rPr lang="en-US" smtClean="0"/>
-              <a:t>5/6/26</a:t>
+              <a:t>5/8/26</a:t>
             </a:fld>
             <a:endParaRPr lang="en-US"/>
           </a:p>
@@ -2323,7 +2323,7 @@
           <a:p>
             <a:fld id="{779551AF-0EE3-DD4B-B4EF-6D8229EA0D86}" type="datetimeFigureOut">
               <a:rPr lang="en-US" smtClean="0"/>
-              <a:t>5/6/26</a:t>
+              <a:t>5/8/26</a:t>
             </a:fld>
             <a:endParaRPr lang="en-US"/>
           </a:p>
@@ -2436,7 +2436,7 @@
           <a:p>
             <a:fld id="{779551AF-0EE3-DD4B-B4EF-6D8229EA0D86}" type="datetimeFigureOut">
               <a:rPr lang="en-US" smtClean="0"/>
-              <a:t>5/6/26</a:t>
+              <a:t>5/8/26</a:t>
             </a:fld>
             <a:endParaRPr lang="en-US"/>
           </a:p>
@@ -2747,7 +2747,7 @@
           <a:p>
             <a:fld id="{779551AF-0EE3-DD4B-B4EF-6D8229EA0D86}" type="datetimeFigureOut">
               <a:rPr lang="en-US" smtClean="0"/>
-              <a:t>5/6/26</a:t>
+              <a:t>5/8/26</a:t>
             </a:fld>
             <a:endParaRPr lang="en-US"/>
           </a:p>
@@ -3035,7 +3035,7 @@
           <a:p>
             <a:fld id="{779551AF-0EE3-DD4B-B4EF-6D8229EA0D86}" type="datetimeFigureOut">
               <a:rPr lang="en-US" smtClean="0"/>
-              <a:t>5/6/26</a:t>
+              <a:t>5/8/26</a:t>
             </a:fld>
             <a:endParaRPr lang="en-US"/>
           </a:p>
@@ -3276,7 +3276,7 @@
           <a:p>
             <a:fld id="{779551AF-0EE3-DD4B-B4EF-6D8229EA0D86}" type="datetimeFigureOut">
               <a:rPr lang="en-US" smtClean="0"/>
-              <a:t>5/6/26</a:t>
+              <a:t>5/8/26</a:t>
             </a:fld>
             <a:endParaRPr lang="en-US"/>
           </a:p>
@@ -4810,7 +4810,7 @@
         </p:nvSpPr>
         <p:spPr>
           <a:xfrm>
-            <a:off x="838200" y="1452392"/>
+            <a:off x="838200" y="1360114"/>
             <a:ext cx="10537627" cy="5632311"/>
           </a:xfrm>
           <a:prstGeom prst="rect">
@@ -4904,13 +4904,7 @@
             </a:pPr>
             <a:r>
               <a:rPr lang="en-US" sz="2400" dirty="0"/>
-              <a:t> All your presentation materials should be uploaded on Moodle in the</a:t>
-            </a:r>
-          </a:p>
-          <a:p>
-            <a:r>
-              <a:rPr lang="en-US" sz="2400" dirty="0"/>
-              <a:t>designated space</a:t>
+              <a:t> All your presentation materials (pptx and also convert it to .pdf) should be uploaded in GitHub in a folder named presentation</a:t>
             </a:r>
           </a:p>
           <a:p>
